--- a/images/puzzle-type/explainers.pptx
+++ b/images/puzzle-type/explainers.pptx
@@ -7,7 +7,8 @@
   <p:sldIdLst>
     <p:sldId id="257" r:id="rId2"/>
     <p:sldId id="258" r:id="rId3"/>
-    <p:sldId id="256" r:id="rId4"/>
+    <p:sldId id="259" r:id="rId4"/>
+    <p:sldId id="256" r:id="rId5"/>
   </p:sldIdLst>
   <p:sldSz cx="12192000" cy="6858000"/>
   <p:notesSz cx="6858000" cy="9144000"/>
@@ -114,7 +115,7 @@
             <a:srgbClr val="A4A3A4"/>
           </p15:clr>
         </p15:guide>
-        <p15:guide id="2" pos="3840" userDrawn="1">
+        <p15:guide id="2" pos="3863" userDrawn="1">
           <p15:clr>
             <a:srgbClr val="A4A3A4"/>
           </p15:clr>
@@ -272,7 +273,7 @@
           <a:p>
             <a:fld id="{6C09CEF5-53DB-45E1-A0F4-8B833BCEFF33}" type="datetimeFigureOut">
               <a:rPr lang="en-US" smtClean="0"/>
-              <a:t>1/23/2021</a:t>
+              <a:t>1/25/2021</a:t>
             </a:fld>
             <a:endParaRPr lang="en-US"/>
           </a:p>
@@ -470,7 +471,7 @@
           <a:p>
             <a:fld id="{6C09CEF5-53DB-45E1-A0F4-8B833BCEFF33}" type="datetimeFigureOut">
               <a:rPr lang="en-US" smtClean="0"/>
-              <a:t>1/23/2021</a:t>
+              <a:t>1/25/2021</a:t>
             </a:fld>
             <a:endParaRPr lang="en-US"/>
           </a:p>
@@ -678,7 +679,7 @@
           <a:p>
             <a:fld id="{6C09CEF5-53DB-45E1-A0F4-8B833BCEFF33}" type="datetimeFigureOut">
               <a:rPr lang="en-US" smtClean="0"/>
-              <a:t>1/23/2021</a:t>
+              <a:t>1/25/2021</a:t>
             </a:fld>
             <a:endParaRPr lang="en-US"/>
           </a:p>
@@ -876,7 +877,7 @@
           <a:p>
             <a:fld id="{6C09CEF5-53DB-45E1-A0F4-8B833BCEFF33}" type="datetimeFigureOut">
               <a:rPr lang="en-US" smtClean="0"/>
-              <a:t>1/23/2021</a:t>
+              <a:t>1/25/2021</a:t>
             </a:fld>
             <a:endParaRPr lang="en-US"/>
           </a:p>
@@ -1151,7 +1152,7 @@
           <a:p>
             <a:fld id="{6C09CEF5-53DB-45E1-A0F4-8B833BCEFF33}" type="datetimeFigureOut">
               <a:rPr lang="en-US" smtClean="0"/>
-              <a:t>1/23/2021</a:t>
+              <a:t>1/25/2021</a:t>
             </a:fld>
             <a:endParaRPr lang="en-US"/>
           </a:p>
@@ -1416,7 +1417,7 @@
           <a:p>
             <a:fld id="{6C09CEF5-53DB-45E1-A0F4-8B833BCEFF33}" type="datetimeFigureOut">
               <a:rPr lang="en-US" smtClean="0"/>
-              <a:t>1/23/2021</a:t>
+              <a:t>1/25/2021</a:t>
             </a:fld>
             <a:endParaRPr lang="en-US"/>
           </a:p>
@@ -1828,7 +1829,7 @@
           <a:p>
             <a:fld id="{6C09CEF5-53DB-45E1-A0F4-8B833BCEFF33}" type="datetimeFigureOut">
               <a:rPr lang="en-US" smtClean="0"/>
-              <a:t>1/23/2021</a:t>
+              <a:t>1/25/2021</a:t>
             </a:fld>
             <a:endParaRPr lang="en-US"/>
           </a:p>
@@ -1969,7 +1970,7 @@
           <a:p>
             <a:fld id="{6C09CEF5-53DB-45E1-A0F4-8B833BCEFF33}" type="datetimeFigureOut">
               <a:rPr lang="en-US" smtClean="0"/>
-              <a:t>1/23/2021</a:t>
+              <a:t>1/25/2021</a:t>
             </a:fld>
             <a:endParaRPr lang="en-US"/>
           </a:p>
@@ -2082,7 +2083,7 @@
           <a:p>
             <a:fld id="{6C09CEF5-53DB-45E1-A0F4-8B833BCEFF33}" type="datetimeFigureOut">
               <a:rPr lang="en-US" smtClean="0"/>
-              <a:t>1/23/2021</a:t>
+              <a:t>1/25/2021</a:t>
             </a:fld>
             <a:endParaRPr lang="en-US"/>
           </a:p>
@@ -2393,7 +2394,7 @@
           <a:p>
             <a:fld id="{6C09CEF5-53DB-45E1-A0F4-8B833BCEFF33}" type="datetimeFigureOut">
               <a:rPr lang="en-US" smtClean="0"/>
-              <a:t>1/23/2021</a:t>
+              <a:t>1/25/2021</a:t>
             </a:fld>
             <a:endParaRPr lang="en-US"/>
           </a:p>
@@ -2681,7 +2682,7 @@
           <a:p>
             <a:fld id="{6C09CEF5-53DB-45E1-A0F4-8B833BCEFF33}" type="datetimeFigureOut">
               <a:rPr lang="en-US" smtClean="0"/>
-              <a:t>1/23/2021</a:t>
+              <a:t>1/25/2021</a:t>
             </a:fld>
             <a:endParaRPr lang="en-US"/>
           </a:p>
@@ -2922,7 +2923,7 @@
           <a:p>
             <a:fld id="{6C09CEF5-53DB-45E1-A0F4-8B833BCEFF33}" type="datetimeFigureOut">
               <a:rPr lang="en-US" smtClean="0"/>
-              <a:t>1/23/2021</a:t>
+              <a:t>1/25/2021</a:t>
             </a:fld>
             <a:endParaRPr lang="en-US"/>
           </a:p>
@@ -4576,16 +4577,16 @@
           <a:lstStyle/>
           <a:p>
             <a:pPr algn="ctr"/>
-            <a:endParaRPr lang="en-US"/>
+            <a:endParaRPr lang="en-US" dirty="0"/>
           </a:p>
         </p:txBody>
       </p:sp>
       <p:pic>
         <p:nvPicPr>
-          <p:cNvPr id="2" name="Picture 1">
-            <a:extLst>
-              <a:ext uri="{FF2B5EF4-FFF2-40B4-BE49-F238E27FC236}">
-                <a16:creationId xmlns:a16="http://schemas.microsoft.com/office/drawing/2014/main" id="{F1D6F6D5-1076-4E0B-B017-E5FEB1121D0E}"/>
+          <p:cNvPr id="4" name="Picture 3">
+            <a:extLst>
+              <a:ext uri="{FF2B5EF4-FFF2-40B4-BE49-F238E27FC236}">
+                <a16:creationId xmlns:a16="http://schemas.microsoft.com/office/drawing/2014/main" id="{2070703C-B5A9-4AFC-97E3-51419F9F1373}"/>
               </a:ext>
             </a:extLst>
           </p:cNvPr>
@@ -4602,7 +4603,7 @@
         </p:blipFill>
         <p:spPr>
           <a:xfrm>
-            <a:off x="89466" y="30643"/>
+            <a:off x="0" y="0"/>
             <a:ext cx="12192000" cy="6857999"/>
           </a:xfrm>
           <a:prstGeom prst="rect">
@@ -5381,7 +5382,7 @@
         <p:spPr>
           <a:xfrm>
             <a:off x="13065551" y="6413077"/>
-            <a:ext cx="3381562" cy="954107"/>
+            <a:ext cx="3381562" cy="523220"/>
           </a:xfrm>
           <a:prstGeom prst="rect">
             <a:avLst/>
@@ -5414,16 +5415,13 @@
               </a:rPr>
               <a:t>fullscreen</a:t>
             </a:r>
-            <a:r>
-              <a:rPr lang="en-US" sz="2800" dirty="0">
-                <a:solidFill>
-                  <a:schemeClr val="bg1"/>
-                </a:solidFill>
-                <a:latin typeface="Arial" panose="020B0604020202020204" pitchFamily="34" charset="0"/>
-                <a:cs typeface="Arial" panose="020B0604020202020204" pitchFamily="34" charset="0"/>
-              </a:rPr>
-              <a:t> and</a:t>
-            </a:r>
+            <a:endParaRPr lang="en-US" sz="2800" dirty="0">
+              <a:solidFill>
+                <a:schemeClr val="bg1"/>
+              </a:solidFill>
+              <a:latin typeface="Arial" panose="020B0604020202020204" pitchFamily="34" charset="0"/>
+              <a:cs typeface="Arial" panose="020B0604020202020204" pitchFamily="34" charset="0"/>
+            </a:endParaRPr>
           </a:p>
         </p:txBody>
       </p:sp>
@@ -5508,6 +5506,16 @@
           <a:lstStyle/>
           <a:p>
             <a:r>
+              <a:rPr lang="en-US" sz="2800" b="1" dirty="0">
+                <a:solidFill>
+                  <a:schemeClr val="bg1"/>
+                </a:solidFill>
+                <a:latin typeface="Arial" panose="020B0604020202020204" pitchFamily="34" charset="0"/>
+                <a:cs typeface="Arial" panose="020B0604020202020204" pitchFamily="34" charset="0"/>
+              </a:rPr>
+              <a:t>music </a:t>
+            </a:r>
+            <a:r>
               <a:rPr lang="en-US" sz="2800" dirty="0">
                 <a:solidFill>
                   <a:schemeClr val="bg1"/>
@@ -5515,7 +5523,7 @@
                 <a:latin typeface="Arial" panose="020B0604020202020204" pitchFamily="34" charset="0"/>
                 <a:cs typeface="Arial" panose="020B0604020202020204" pitchFamily="34" charset="0"/>
               </a:rPr>
-              <a:t>the </a:t>
+              <a:t>is</a:t>
             </a:r>
             <a:r>
               <a:rPr lang="en-US" sz="2800" b="1" dirty="0">
@@ -5525,7 +5533,7 @@
                 <a:latin typeface="Arial" panose="020B0604020202020204" pitchFamily="34" charset="0"/>
                 <a:cs typeface="Arial" panose="020B0604020202020204" pitchFamily="34" charset="0"/>
               </a:rPr>
-              <a:t>music is on</a:t>
+              <a:t> on</a:t>
             </a:r>
           </a:p>
         </p:txBody>
@@ -5585,8 +5593,8 @@
         </p:nvSpPr>
         <p:spPr>
           <a:xfrm rot="18829126">
-            <a:off x="-581288" y="-731987"/>
-            <a:ext cx="311256" cy="1093593"/>
+            <a:off x="-446173" y="-642937"/>
+            <a:ext cx="311256" cy="704255"/>
           </a:xfrm>
           <a:prstGeom prst="downArrow">
             <a:avLst/>
@@ -5666,71 +5674,10 @@
       </p:sp>
       <p:sp>
         <p:nvSpPr>
-          <p:cNvPr id="42" name="TextBox 41">
-            <a:extLst>
-              <a:ext uri="{FF2B5EF4-FFF2-40B4-BE49-F238E27FC236}">
-                <a16:creationId xmlns:a16="http://schemas.microsoft.com/office/drawing/2014/main" id="{298E1C9C-D6DD-49F9-BCF9-28A2CC263F7F}"/>
-              </a:ext>
-            </a:extLst>
-          </p:cNvPr>
-          <p:cNvSpPr txBox="1"/>
-          <p:nvPr/>
-        </p:nvSpPr>
-        <p:spPr>
-          <a:xfrm>
-            <a:off x="11522286" y="-646906"/>
-            <a:ext cx="3543490" cy="369332"/>
-          </a:xfrm>
-          <a:prstGeom prst="rect">
-            <a:avLst/>
-          </a:prstGeom>
-          <a:noFill/>
-        </p:spPr>
-        <p:txBody>
-          <a:bodyPr wrap="square" rtlCol="0">
-            <a:spAutoFit/>
-          </a:bodyPr>
-          <a:lstStyle/>
-          <a:p>
-            <a:r>
-              <a:rPr lang="en-US" b="1" i="1" dirty="0">
-                <a:solidFill>
-                  <a:schemeClr val="bg1"/>
-                </a:solidFill>
-                <a:latin typeface="Arial" panose="020B0604020202020204" pitchFamily="34" charset="0"/>
-                <a:cs typeface="Arial" panose="020B0604020202020204" pitchFamily="34" charset="0"/>
-              </a:rPr>
-              <a:t>2-star </a:t>
-            </a:r>
-            <a:r>
-              <a:rPr lang="en-US" i="1" dirty="0">
-                <a:solidFill>
-                  <a:schemeClr val="bg1"/>
-                </a:solidFill>
-                <a:latin typeface="Arial" panose="020B0604020202020204" pitchFamily="34" charset="0"/>
-                <a:cs typeface="Arial" panose="020B0604020202020204" pitchFamily="34" charset="0"/>
-              </a:rPr>
-              <a:t>levels are </a:t>
-            </a:r>
-            <a:r>
-              <a:rPr lang="en-US" b="1" i="1" dirty="0">
-                <a:solidFill>
-                  <a:schemeClr val="bg1"/>
-                </a:solidFill>
-                <a:latin typeface="Arial" panose="020B0604020202020204" pitchFamily="34" charset="0"/>
-                <a:cs typeface="Arial" panose="020B0604020202020204" pitchFamily="34" charset="0"/>
-              </a:rPr>
-              <a:t>a bit less easy</a:t>
-            </a:r>
-          </a:p>
-        </p:txBody>
-      </p:sp>
-      <p:sp>
-        <p:nvSpPr>
-          <p:cNvPr id="44" name="Arrow: Down 43">
-            <a:extLst>
-              <a:ext uri="{FF2B5EF4-FFF2-40B4-BE49-F238E27FC236}">
-                <a16:creationId xmlns:a16="http://schemas.microsoft.com/office/drawing/2014/main" id="{9DE0F1D6-B71F-4F41-9350-4CBFB46C1492}"/>
+          <p:cNvPr id="51" name="Arrow: Down 50">
+            <a:extLst>
+              <a:ext uri="{FF2B5EF4-FFF2-40B4-BE49-F238E27FC236}">
+                <a16:creationId xmlns:a16="http://schemas.microsoft.com/office/drawing/2014/main" id="{3174C795-3485-4512-9621-F4FD1B56DA8C}"/>
               </a:ext>
             </a:extLst>
           </p:cNvPr>
@@ -5738,12 +5685,15 @@
           <p:nvPr/>
         </p:nvSpPr>
         <p:spPr>
-          <a:xfrm rot="2717767">
-            <a:off x="11272838" y="-406907"/>
-            <a:ext cx="311256" cy="391124"/>
+          <a:xfrm rot="12169986">
+            <a:off x="4804354" y="6890099"/>
+            <a:ext cx="1017160" cy="2081216"/>
           </a:xfrm>
           <a:prstGeom prst="downArrow">
-            <a:avLst/>
+            <a:avLst>
+              <a:gd name="adj1" fmla="val 27740"/>
+              <a:gd name="adj2" fmla="val 61554"/>
+            </a:avLst>
           </a:prstGeom>
           <a:solidFill>
             <a:schemeClr val="bg1"/>
@@ -5773,16 +5723,118 @@
           <a:lstStyle/>
           <a:p>
             <a:pPr algn="ctr"/>
-            <a:endParaRPr lang="en-US"/>
-          </a:p>
-        </p:txBody>
-      </p:sp>
-      <p:sp>
-        <p:nvSpPr>
-          <p:cNvPr id="51" name="Arrow: Down 50">
-            <a:extLst>
-              <a:ext uri="{FF2B5EF4-FFF2-40B4-BE49-F238E27FC236}">
-                <a16:creationId xmlns:a16="http://schemas.microsoft.com/office/drawing/2014/main" id="{3174C795-3485-4512-9621-F4FD1B56DA8C}"/>
+            <a:endParaRPr lang="en-US" dirty="0"/>
+          </a:p>
+        </p:txBody>
+      </p:sp>
+      <p:sp>
+        <p:nvSpPr>
+          <p:cNvPr id="54" name="TextBox 53">
+            <a:extLst>
+              <a:ext uri="{FF2B5EF4-FFF2-40B4-BE49-F238E27FC236}">
+                <a16:creationId xmlns:a16="http://schemas.microsoft.com/office/drawing/2014/main" id="{75DA362D-3969-4AC3-914C-8A20519164E6}"/>
+              </a:ext>
+            </a:extLst>
+          </p:cNvPr>
+          <p:cNvSpPr txBox="1"/>
+          <p:nvPr/>
+        </p:nvSpPr>
+        <p:spPr>
+          <a:xfrm>
+            <a:off x="1266097" y="8872557"/>
+            <a:ext cx="5377591" cy="707886"/>
+          </a:xfrm>
+          <a:prstGeom prst="rect">
+            <a:avLst/>
+          </a:prstGeom>
+          <a:noFill/>
+        </p:spPr>
+        <p:txBody>
+          <a:bodyPr wrap="square" rtlCol="0">
+            <a:spAutoFit/>
+          </a:bodyPr>
+          <a:lstStyle/>
+          <a:p>
+            <a:r>
+              <a:rPr lang="en-US" sz="4000" dirty="0">
+                <a:solidFill>
+                  <a:schemeClr val="bg1"/>
+                </a:solidFill>
+                <a:latin typeface="Arial" panose="020B0604020202020204" pitchFamily="34" charset="0"/>
+                <a:cs typeface="Arial" panose="020B0604020202020204" pitchFamily="34" charset="0"/>
+              </a:rPr>
+              <a:t>Or shall we </a:t>
+            </a:r>
+            <a:r>
+              <a:rPr lang="en-US" sz="4000" b="1" dirty="0">
+                <a:solidFill>
+                  <a:schemeClr val="bg1"/>
+                </a:solidFill>
+                <a:latin typeface="Arial" panose="020B0604020202020204" pitchFamily="34" charset="0"/>
+                <a:cs typeface="Arial" panose="020B0604020202020204" pitchFamily="34" charset="0"/>
+              </a:rPr>
+              <a:t>restart</a:t>
+            </a:r>
+            <a:r>
+              <a:rPr lang="en-US" sz="4000" dirty="0">
+                <a:solidFill>
+                  <a:schemeClr val="bg1"/>
+                </a:solidFill>
+                <a:latin typeface="Arial" panose="020B0604020202020204" pitchFamily="34" charset="0"/>
+                <a:cs typeface="Arial" panose="020B0604020202020204" pitchFamily="34" charset="0"/>
+              </a:rPr>
+              <a:t>?</a:t>
+            </a:r>
+          </a:p>
+        </p:txBody>
+      </p:sp>
+      <p:sp>
+        <p:nvSpPr>
+          <p:cNvPr id="30" name="TextBox 29">
+            <a:extLst>
+              <a:ext uri="{FF2B5EF4-FFF2-40B4-BE49-F238E27FC236}">
+                <a16:creationId xmlns:a16="http://schemas.microsoft.com/office/drawing/2014/main" id="{1F2A1529-D21B-4D61-AFB0-7A6A76A6B5CD}"/>
+              </a:ext>
+            </a:extLst>
+          </p:cNvPr>
+          <p:cNvSpPr txBox="1"/>
+          <p:nvPr/>
+        </p:nvSpPr>
+        <p:spPr>
+          <a:xfrm>
+            <a:off x="11543917" y="-680009"/>
+            <a:ext cx="3831848" cy="369332"/>
+          </a:xfrm>
+          <a:prstGeom prst="rect">
+            <a:avLst/>
+          </a:prstGeom>
+          <a:noFill/>
+        </p:spPr>
+        <p:txBody>
+          <a:bodyPr wrap="square" rtlCol="0">
+            <a:spAutoFit/>
+          </a:bodyPr>
+          <a:lstStyle/>
+          <a:p>
+            <a:r>
+              <a:rPr lang="en-US" b="1" i="1" dirty="0">
+                <a:solidFill>
+                  <a:schemeClr val="bg1"/>
+                </a:solidFill>
+                <a:latin typeface="Arial" panose="020B0604020202020204" pitchFamily="34" charset="0"/>
+                <a:cs typeface="Arial" panose="020B0604020202020204" pitchFamily="34" charset="0"/>
+              </a:rPr>
+              <a:t>2 stars is still easy</a:t>
+            </a:r>
+          </a:p>
+        </p:txBody>
+      </p:sp>
+      <p:sp>
+        <p:nvSpPr>
+          <p:cNvPr id="32" name="Arrow: Down 31">
+            <a:extLst>
+              <a:ext uri="{FF2B5EF4-FFF2-40B4-BE49-F238E27FC236}">
+                <a16:creationId xmlns:a16="http://schemas.microsoft.com/office/drawing/2014/main" id="{EACF88EC-493D-4E41-8FEE-605DD9A3443B}"/>
               </a:ext>
             </a:extLst>
           </p:cNvPr>
@@ -5790,15 +5842,12 @@
           <p:nvPr/>
         </p:nvSpPr>
         <p:spPr>
-          <a:xfrm rot="12169986">
-            <a:off x="4804354" y="6890099"/>
-            <a:ext cx="1017160" cy="2081216"/>
+          <a:xfrm rot="2717767">
+            <a:off x="11272838" y="-406907"/>
+            <a:ext cx="311256" cy="391124"/>
           </a:xfrm>
           <a:prstGeom prst="downArrow">
-            <a:avLst>
-              <a:gd name="adj1" fmla="val 27740"/>
-              <a:gd name="adj2" fmla="val 61554"/>
-            </a:avLst>
+            <a:avLst/>
           </a:prstGeom>
           <a:solidFill>
             <a:schemeClr val="bg1"/>
@@ -5828,68 +5877,7 @@
           <a:lstStyle/>
           <a:p>
             <a:pPr algn="ctr"/>
-            <a:endParaRPr lang="en-US" dirty="0"/>
-          </a:p>
-        </p:txBody>
-      </p:sp>
-      <p:sp>
-        <p:nvSpPr>
-          <p:cNvPr id="54" name="TextBox 53">
-            <a:extLst>
-              <a:ext uri="{FF2B5EF4-FFF2-40B4-BE49-F238E27FC236}">
-                <a16:creationId xmlns:a16="http://schemas.microsoft.com/office/drawing/2014/main" id="{75DA362D-3969-4AC3-914C-8A20519164E6}"/>
-              </a:ext>
-            </a:extLst>
-          </p:cNvPr>
-          <p:cNvSpPr txBox="1"/>
-          <p:nvPr/>
-        </p:nvSpPr>
-        <p:spPr>
-          <a:xfrm>
-            <a:off x="1266097" y="8872557"/>
-            <a:ext cx="5377591" cy="707886"/>
-          </a:xfrm>
-          <a:prstGeom prst="rect">
-            <a:avLst/>
-          </a:prstGeom>
-          <a:noFill/>
-        </p:spPr>
-        <p:txBody>
-          <a:bodyPr wrap="square" rtlCol="0">
-            <a:spAutoFit/>
-          </a:bodyPr>
-          <a:lstStyle/>
-          <a:p>
-            <a:r>
-              <a:rPr lang="en-US" sz="4000" dirty="0">
-                <a:solidFill>
-                  <a:schemeClr val="bg1"/>
-                </a:solidFill>
-                <a:latin typeface="Arial" panose="020B0604020202020204" pitchFamily="34" charset="0"/>
-                <a:cs typeface="Arial" panose="020B0604020202020204" pitchFamily="34" charset="0"/>
-              </a:rPr>
-              <a:t>Or shall we </a:t>
-            </a:r>
-            <a:r>
-              <a:rPr lang="en-US" sz="4000" b="1" dirty="0">
-                <a:solidFill>
-                  <a:schemeClr val="bg1"/>
-                </a:solidFill>
-                <a:latin typeface="Arial" panose="020B0604020202020204" pitchFamily="34" charset="0"/>
-                <a:cs typeface="Arial" panose="020B0604020202020204" pitchFamily="34" charset="0"/>
-              </a:rPr>
-              <a:t>restart</a:t>
-            </a:r>
-            <a:r>
-              <a:rPr lang="en-US" sz="4000" dirty="0">
-                <a:solidFill>
-                  <a:schemeClr val="bg1"/>
-                </a:solidFill>
-                <a:latin typeface="Arial" panose="020B0604020202020204" pitchFamily="34" charset="0"/>
-                <a:cs typeface="Arial" panose="020B0604020202020204" pitchFamily="34" charset="0"/>
-              </a:rPr>
-              <a:t>?</a:t>
-            </a:r>
+            <a:endParaRPr lang="en-US"/>
           </a:p>
         </p:txBody>
       </p:sp>
@@ -5973,16 +5961,16 @@
           <a:lstStyle/>
           <a:p>
             <a:pPr algn="ctr"/>
-            <a:endParaRPr lang="en-US"/>
+            <a:endParaRPr lang="en-US" dirty="0"/>
           </a:p>
         </p:txBody>
       </p:sp>
       <p:pic>
         <p:nvPicPr>
-          <p:cNvPr id="43" name="Picture 42">
-            <a:extLst>
-              <a:ext uri="{FF2B5EF4-FFF2-40B4-BE49-F238E27FC236}">
-                <a16:creationId xmlns:a16="http://schemas.microsoft.com/office/drawing/2014/main" id="{8D46B9FE-8AD0-46FC-979F-422FA2E4A986}"/>
+          <p:cNvPr id="2" name="Picture 1">
+            <a:extLst>
+              <a:ext uri="{FF2B5EF4-FFF2-40B4-BE49-F238E27FC236}">
+                <a16:creationId xmlns:a16="http://schemas.microsoft.com/office/drawing/2014/main" id="{4FA500A4-9D5A-49ED-A97A-B737713BA5DF}"/>
               </a:ext>
             </a:extLst>
           </p:cNvPr>
@@ -5999,7 +5987,7 @@
         </p:blipFill>
         <p:spPr>
           <a:xfrm>
-            <a:off x="0" y="0"/>
+            <a:off x="-1" y="-22136"/>
             <a:ext cx="12192000" cy="6857999"/>
           </a:xfrm>
           <a:prstGeom prst="rect">
@@ -6522,10 +6510,10 @@
       </p:sp>
       <p:sp>
         <p:nvSpPr>
-          <p:cNvPr id="45" name="TextBox 44">
-            <a:extLst>
-              <a:ext uri="{FF2B5EF4-FFF2-40B4-BE49-F238E27FC236}">
-                <a16:creationId xmlns:a16="http://schemas.microsoft.com/office/drawing/2014/main" id="{4B9054AB-6B76-4B50-84FD-86F227276697}"/>
+          <p:cNvPr id="52" name="TextBox 51">
+            <a:extLst>
+              <a:ext uri="{FF2B5EF4-FFF2-40B4-BE49-F238E27FC236}">
+                <a16:creationId xmlns:a16="http://schemas.microsoft.com/office/drawing/2014/main" id="{B8EE408C-0E4C-4273-BA6E-B5CE36BD7831}"/>
               </a:ext>
             </a:extLst>
           </p:cNvPr>
@@ -6534,8 +6522,8 @@
         </p:nvSpPr>
         <p:spPr>
           <a:xfrm>
-            <a:off x="11543917" y="-680009"/>
-            <a:ext cx="3831848" cy="369332"/>
+            <a:off x="-870117" y="7051815"/>
+            <a:ext cx="4160932" cy="1323439"/>
           </a:xfrm>
           <a:prstGeom prst="rect">
             <a:avLst/>
@@ -6549,24 +6537,146 @@
           <a:lstStyle/>
           <a:p>
             <a:r>
-              <a:rPr lang="en-US" b="1" i="1" dirty="0">
+              <a:rPr lang="en-US" sz="4000" dirty="0">
                 <a:solidFill>
                   <a:schemeClr val="bg1"/>
                 </a:solidFill>
                 <a:latin typeface="Arial" panose="020B0604020202020204" pitchFamily="34" charset="0"/>
                 <a:cs typeface="Arial" panose="020B0604020202020204" pitchFamily="34" charset="0"/>
               </a:rPr>
-              <a:t>Difficulty may rise up to 5 stars</a:t>
-            </a:r>
-          </a:p>
-        </p:txBody>
-      </p:sp>
-      <p:sp>
-        <p:nvSpPr>
-          <p:cNvPr id="46" name="Arrow: Down 45">
-            <a:extLst>
-              <a:ext uri="{FF2B5EF4-FFF2-40B4-BE49-F238E27FC236}">
-                <a16:creationId xmlns:a16="http://schemas.microsoft.com/office/drawing/2014/main" id="{761B991B-0406-4914-A43C-699F1414F031}"/>
+              <a:t>Need a </a:t>
+            </a:r>
+            <a:r>
+              <a:rPr lang="en-US" sz="4000" b="1" dirty="0">
+                <a:solidFill>
+                  <a:schemeClr val="bg1"/>
+                </a:solidFill>
+                <a:latin typeface="Arial" panose="020B0604020202020204" pitchFamily="34" charset="0"/>
+                <a:cs typeface="Arial" panose="020B0604020202020204" pitchFamily="34" charset="0"/>
+              </a:rPr>
+              <a:t>hint</a:t>
+            </a:r>
+            <a:r>
+              <a:rPr lang="en-US" sz="4000" dirty="0">
+                <a:solidFill>
+                  <a:schemeClr val="bg1"/>
+                </a:solidFill>
+                <a:latin typeface="Arial" panose="020B0604020202020204" pitchFamily="34" charset="0"/>
+                <a:cs typeface="Arial" panose="020B0604020202020204" pitchFamily="34" charset="0"/>
+              </a:rPr>
+              <a:t>? </a:t>
+            </a:r>
+          </a:p>
+          <a:p>
+            <a:r>
+              <a:rPr lang="en-US" sz="4000" dirty="0">
+                <a:solidFill>
+                  <a:schemeClr val="bg1"/>
+                </a:solidFill>
+                <a:latin typeface="Arial" panose="020B0604020202020204" pitchFamily="34" charset="0"/>
+                <a:cs typeface="Arial" panose="020B0604020202020204" pitchFamily="34" charset="0"/>
+              </a:rPr>
+              <a:t>Press this key!</a:t>
+            </a:r>
+          </a:p>
+        </p:txBody>
+      </p:sp>
+      <p:sp>
+        <p:nvSpPr>
+          <p:cNvPr id="54" name="TextBox 53">
+            <a:extLst>
+              <a:ext uri="{FF2B5EF4-FFF2-40B4-BE49-F238E27FC236}">
+                <a16:creationId xmlns:a16="http://schemas.microsoft.com/office/drawing/2014/main" id="{050C4F2E-6F64-4AEB-81DD-551840D845F8}"/>
+              </a:ext>
+            </a:extLst>
+          </p:cNvPr>
+          <p:cNvSpPr txBox="1"/>
+          <p:nvPr/>
+        </p:nvSpPr>
+        <p:spPr>
+          <a:xfrm rot="1026459">
+            <a:off x="-3806334" y="2599248"/>
+            <a:ext cx="3719308" cy="1015663"/>
+          </a:xfrm>
+          <a:prstGeom prst="rect">
+            <a:avLst/>
+          </a:prstGeom>
+          <a:noFill/>
+        </p:spPr>
+        <p:txBody>
+          <a:bodyPr wrap="square" rtlCol="0">
+            <a:spAutoFit/>
+          </a:bodyPr>
+          <a:lstStyle/>
+          <a:p>
+            <a:pPr algn="ctr"/>
+            <a:r>
+              <a:rPr lang="en-US" sz="6000" b="1" dirty="0">
+                <a:solidFill>
+                  <a:schemeClr val="bg1"/>
+                </a:solidFill>
+                <a:latin typeface="Arial" panose="020B0604020202020204" pitchFamily="34" charset="0"/>
+                <a:cs typeface="Arial" panose="020B0604020202020204" pitchFamily="34" charset="0"/>
+              </a:rPr>
+              <a:t>?????</a:t>
+            </a:r>
+            <a:endParaRPr lang="en-US" sz="4000" b="1" dirty="0">
+              <a:solidFill>
+                <a:schemeClr val="bg1"/>
+              </a:solidFill>
+              <a:latin typeface="Arial" panose="020B0604020202020204" pitchFamily="34" charset="0"/>
+              <a:cs typeface="Arial" panose="020B0604020202020204" pitchFamily="34" charset="0"/>
+            </a:endParaRPr>
+          </a:p>
+        </p:txBody>
+      </p:sp>
+      <p:sp>
+        <p:nvSpPr>
+          <p:cNvPr id="59" name="TextBox 58">
+            <a:extLst>
+              <a:ext uri="{FF2B5EF4-FFF2-40B4-BE49-F238E27FC236}">
+                <a16:creationId xmlns:a16="http://schemas.microsoft.com/office/drawing/2014/main" id="{6DB6909F-14EC-4858-AC45-046C6D3707DE}"/>
+              </a:ext>
+            </a:extLst>
+          </p:cNvPr>
+          <p:cNvSpPr txBox="1"/>
+          <p:nvPr/>
+        </p:nvSpPr>
+        <p:spPr>
+          <a:xfrm>
+            <a:off x="4650295" y="7283458"/>
+            <a:ext cx="4515788" cy="707886"/>
+          </a:xfrm>
+          <a:prstGeom prst="rect">
+            <a:avLst/>
+          </a:prstGeom>
+          <a:noFill/>
+        </p:spPr>
+        <p:txBody>
+          <a:bodyPr wrap="square" rtlCol="0">
+            <a:spAutoFit/>
+          </a:bodyPr>
+          <a:lstStyle/>
+          <a:p>
+            <a:r>
+              <a:rPr lang="en-US" sz="4000" dirty="0">
+                <a:solidFill>
+                  <a:schemeClr val="bg1"/>
+                </a:solidFill>
+                <a:latin typeface="Arial" panose="020B0604020202020204" pitchFamily="34" charset="0"/>
+                <a:cs typeface="Arial" panose="020B0604020202020204" pitchFamily="34" charset="0"/>
+              </a:rPr>
+              <a:t>Hints appear here,</a:t>
+            </a:r>
+          </a:p>
+        </p:txBody>
+      </p:sp>
+      <p:sp>
+        <p:nvSpPr>
+          <p:cNvPr id="27" name="Arrow: Down 26">
+            <a:extLst>
+              <a:ext uri="{FF2B5EF4-FFF2-40B4-BE49-F238E27FC236}">
+                <a16:creationId xmlns:a16="http://schemas.microsoft.com/office/drawing/2014/main" id="{F25D5911-E59E-401D-89CD-79AD7F4C69E4}"/>
               </a:ext>
             </a:extLst>
           </p:cNvPr>
@@ -6574,12 +6684,15 @@
           <p:nvPr/>
         </p:nvSpPr>
         <p:spPr>
-          <a:xfrm rot="2717767">
-            <a:off x="11272838" y="-406907"/>
-            <a:ext cx="311256" cy="391124"/>
+          <a:xfrm rot="10800000">
+            <a:off x="2354536" y="6903847"/>
+            <a:ext cx="602672" cy="768392"/>
           </a:xfrm>
           <a:prstGeom prst="downArrow">
-            <a:avLst/>
+            <a:avLst>
+              <a:gd name="adj1" fmla="val 45638"/>
+              <a:gd name="adj2" fmla="val 50000"/>
+            </a:avLst>
           </a:prstGeom>
           <a:solidFill>
             <a:schemeClr val="bg1"/>
@@ -6609,89 +6722,16 @@
           <a:lstStyle/>
           <a:p>
             <a:pPr algn="ctr"/>
-            <a:endParaRPr lang="en-US"/>
-          </a:p>
-        </p:txBody>
-      </p:sp>
-      <p:sp>
-        <p:nvSpPr>
-          <p:cNvPr id="52" name="TextBox 51">
-            <a:extLst>
-              <a:ext uri="{FF2B5EF4-FFF2-40B4-BE49-F238E27FC236}">
-                <a16:creationId xmlns:a16="http://schemas.microsoft.com/office/drawing/2014/main" id="{B8EE408C-0E4C-4273-BA6E-B5CE36BD7831}"/>
-              </a:ext>
-            </a:extLst>
-          </p:cNvPr>
-          <p:cNvSpPr txBox="1"/>
-          <p:nvPr/>
-        </p:nvSpPr>
-        <p:spPr>
-          <a:xfrm>
-            <a:off x="166590" y="7234690"/>
-            <a:ext cx="4160932" cy="1323439"/>
-          </a:xfrm>
-          <a:prstGeom prst="rect">
-            <a:avLst/>
-          </a:prstGeom>
-          <a:noFill/>
-        </p:spPr>
-        <p:txBody>
-          <a:bodyPr wrap="square" rtlCol="0">
-            <a:spAutoFit/>
-          </a:bodyPr>
-          <a:lstStyle/>
-          <a:p>
-            <a:r>
-              <a:rPr lang="en-US" sz="4000" dirty="0">
-                <a:solidFill>
-                  <a:schemeClr val="bg1"/>
-                </a:solidFill>
-                <a:latin typeface="Arial" panose="020B0604020202020204" pitchFamily="34" charset="0"/>
-                <a:cs typeface="Arial" panose="020B0604020202020204" pitchFamily="34" charset="0"/>
-              </a:rPr>
-              <a:t>Need a </a:t>
-            </a:r>
-            <a:r>
-              <a:rPr lang="en-US" sz="4000" b="1" dirty="0">
-                <a:solidFill>
-                  <a:schemeClr val="bg1"/>
-                </a:solidFill>
-                <a:latin typeface="Arial" panose="020B0604020202020204" pitchFamily="34" charset="0"/>
-                <a:cs typeface="Arial" panose="020B0604020202020204" pitchFamily="34" charset="0"/>
-              </a:rPr>
-              <a:t>hint</a:t>
-            </a:r>
-            <a:r>
-              <a:rPr lang="en-US" sz="4000" dirty="0">
-                <a:solidFill>
-                  <a:schemeClr val="bg1"/>
-                </a:solidFill>
-                <a:latin typeface="Arial" panose="020B0604020202020204" pitchFamily="34" charset="0"/>
-                <a:cs typeface="Arial" panose="020B0604020202020204" pitchFamily="34" charset="0"/>
-              </a:rPr>
-              <a:t>? </a:t>
-            </a:r>
-          </a:p>
-          <a:p>
-            <a:r>
-              <a:rPr lang="en-US" sz="4000" dirty="0">
-                <a:solidFill>
-                  <a:schemeClr val="bg1"/>
-                </a:solidFill>
-                <a:latin typeface="Arial" panose="020B0604020202020204" pitchFamily="34" charset="0"/>
-                <a:cs typeface="Arial" panose="020B0604020202020204" pitchFamily="34" charset="0"/>
-              </a:rPr>
-              <a:t>Press this key!</a:t>
-            </a:r>
-          </a:p>
-        </p:txBody>
-      </p:sp>
-      <p:sp>
-        <p:nvSpPr>
-          <p:cNvPr id="53" name="Oval 52">
-            <a:extLst>
-              <a:ext uri="{FF2B5EF4-FFF2-40B4-BE49-F238E27FC236}">
-                <a16:creationId xmlns:a16="http://schemas.microsoft.com/office/drawing/2014/main" id="{286364D5-9DD4-43E3-8E7A-0471A727ABF5}"/>
+            <a:endParaRPr lang="en-US" dirty="0"/>
+          </a:p>
+        </p:txBody>
+      </p:sp>
+      <p:sp>
+        <p:nvSpPr>
+          <p:cNvPr id="30" name="Arrow: Down 29">
+            <a:extLst>
+              <a:ext uri="{FF2B5EF4-FFF2-40B4-BE49-F238E27FC236}">
+                <a16:creationId xmlns:a16="http://schemas.microsoft.com/office/drawing/2014/main" id="{73E33448-3D04-4A13-8548-E3B296036D85}"/>
               </a:ext>
             </a:extLst>
           </p:cNvPr>
@@ -6699,18 +6739,21 @@
           <p:nvPr/>
         </p:nvSpPr>
         <p:spPr>
-          <a:xfrm>
-            <a:off x="2023353" y="6108102"/>
-            <a:ext cx="1011677" cy="1012268"/>
-          </a:xfrm>
-          <a:prstGeom prst="ellipse">
-            <a:avLst/>
-          </a:prstGeom>
-          <a:noFill/>
-          <a:ln w="152400">
-            <a:solidFill>
-              <a:schemeClr val="bg1"/>
-            </a:solidFill>
+          <a:xfrm rot="12681430">
+            <a:off x="6968373" y="5263750"/>
+            <a:ext cx="1496645" cy="2096459"/>
+          </a:xfrm>
+          <a:prstGeom prst="downArrow">
+            <a:avLst>
+              <a:gd name="adj1" fmla="val 36182"/>
+              <a:gd name="adj2" fmla="val 50000"/>
+            </a:avLst>
+          </a:prstGeom>
+          <a:solidFill>
+            <a:schemeClr val="bg1"/>
+          </a:solidFill>
+          <a:ln>
+            <a:noFill/>
           </a:ln>
         </p:spPr>
         <p:style>
@@ -6740,10 +6783,10 @@
       </p:sp>
       <p:sp>
         <p:nvSpPr>
-          <p:cNvPr id="54" name="TextBox 53">
-            <a:extLst>
-              <a:ext uri="{FF2B5EF4-FFF2-40B4-BE49-F238E27FC236}">
-                <a16:creationId xmlns:a16="http://schemas.microsoft.com/office/drawing/2014/main" id="{050C4F2E-6F64-4AEB-81DD-551840D845F8}"/>
+          <p:cNvPr id="31" name="TextBox 30">
+            <a:extLst>
+              <a:ext uri="{FF2B5EF4-FFF2-40B4-BE49-F238E27FC236}">
+                <a16:creationId xmlns:a16="http://schemas.microsoft.com/office/drawing/2014/main" id="{B6A4E0C1-5FF5-4212-B461-A8A60CBF7367}"/>
               </a:ext>
             </a:extLst>
           </p:cNvPr>
@@ -6751,58 +6794,9 @@
           <p:nvPr/>
         </p:nvSpPr>
         <p:spPr>
-          <a:xfrm rot="1026459">
-            <a:off x="-3806334" y="2599248"/>
-            <a:ext cx="3719308" cy="1015663"/>
-          </a:xfrm>
-          <a:prstGeom prst="rect">
-            <a:avLst/>
-          </a:prstGeom>
-          <a:noFill/>
-        </p:spPr>
-        <p:txBody>
-          <a:bodyPr wrap="square" rtlCol="0">
-            <a:spAutoFit/>
-          </a:bodyPr>
-          <a:lstStyle/>
-          <a:p>
-            <a:pPr algn="ctr"/>
-            <a:r>
-              <a:rPr lang="en-US" sz="6000" b="1" dirty="0">
-                <a:solidFill>
-                  <a:schemeClr val="bg1"/>
-                </a:solidFill>
-                <a:latin typeface="Arial" panose="020B0604020202020204" pitchFamily="34" charset="0"/>
-                <a:cs typeface="Arial" panose="020B0604020202020204" pitchFamily="34" charset="0"/>
-              </a:rPr>
-              <a:t>?????</a:t>
-            </a:r>
-            <a:endParaRPr lang="en-US" sz="4000" b="1" dirty="0">
-              <a:solidFill>
-                <a:schemeClr val="bg1"/>
-              </a:solidFill>
-              <a:latin typeface="Arial" panose="020B0604020202020204" pitchFamily="34" charset="0"/>
-              <a:cs typeface="Arial" panose="020B0604020202020204" pitchFamily="34" charset="0"/>
-            </a:endParaRPr>
-          </a:p>
-        </p:txBody>
-      </p:sp>
-      <p:sp>
-        <p:nvSpPr>
-          <p:cNvPr id="55" name="TextBox 54">
-            <a:extLst>
-              <a:ext uri="{FF2B5EF4-FFF2-40B4-BE49-F238E27FC236}">
-                <a16:creationId xmlns:a16="http://schemas.microsoft.com/office/drawing/2014/main" id="{23559C09-DD5E-495B-91A6-C018FDEAB2DD}"/>
-              </a:ext>
-            </a:extLst>
-          </p:cNvPr>
-          <p:cNvSpPr txBox="1"/>
-          <p:nvPr/>
-        </p:nvSpPr>
-        <p:spPr>
           <a:xfrm>
-            <a:off x="-1404478" y="8944114"/>
-            <a:ext cx="12832944" cy="707886"/>
+            <a:off x="7232012" y="7881824"/>
+            <a:ext cx="6587102" cy="707886"/>
           </a:xfrm>
           <a:prstGeom prst="rect">
             <a:avLst/>
@@ -6823,7 +6817,7 @@
                 <a:latin typeface="Arial" panose="020B0604020202020204" pitchFamily="34" charset="0"/>
                 <a:cs typeface="Arial" panose="020B0604020202020204" pitchFamily="34" charset="0"/>
               </a:rPr>
-              <a:t>Also, if you’ve undone too far, just hit </a:t>
+              <a:t>press </a:t>
             </a:r>
             <a:r>
               <a:rPr lang="en-US" sz="4000" b="1" dirty="0">
@@ -6833,24 +6827,27 @@
                 <a:latin typeface="Arial" panose="020B0604020202020204" pitchFamily="34" charset="0"/>
                 <a:cs typeface="Arial" panose="020B0604020202020204" pitchFamily="34" charset="0"/>
               </a:rPr>
-              <a:t>redo.</a:t>
-            </a:r>
-            <a:endParaRPr lang="en-US" sz="4000" dirty="0">
-              <a:solidFill>
-                <a:schemeClr val="bg1"/>
-              </a:solidFill>
-              <a:latin typeface="Arial" panose="020B0604020202020204" pitchFamily="34" charset="0"/>
-              <a:cs typeface="Arial" panose="020B0604020202020204" pitchFamily="34" charset="0"/>
-            </a:endParaRPr>
-          </a:p>
-        </p:txBody>
-      </p:sp>
-      <p:sp>
-        <p:nvSpPr>
-          <p:cNvPr id="56" name="Arrow: Down 55">
-            <a:extLst>
-              <a:ext uri="{FF2B5EF4-FFF2-40B4-BE49-F238E27FC236}">
-                <a16:creationId xmlns:a16="http://schemas.microsoft.com/office/drawing/2014/main" id="{DDAB66D2-22B9-46C0-8D16-733A3D29A1B0}"/>
+              <a:t>next</a:t>
+            </a:r>
+            <a:r>
+              <a:rPr lang="en-US" sz="4000" dirty="0">
+                <a:solidFill>
+                  <a:schemeClr val="bg1"/>
+                </a:solidFill>
+                <a:latin typeface="Arial" panose="020B0604020202020204" pitchFamily="34" charset="0"/>
+                <a:cs typeface="Arial" panose="020B0604020202020204" pitchFamily="34" charset="0"/>
+              </a:rPr>
+              <a:t> for more…</a:t>
+            </a:r>
+          </a:p>
+        </p:txBody>
+      </p:sp>
+      <p:sp>
+        <p:nvSpPr>
+          <p:cNvPr id="32" name="Arrow: Down 31">
+            <a:extLst>
+              <a:ext uri="{FF2B5EF4-FFF2-40B4-BE49-F238E27FC236}">
+                <a16:creationId xmlns:a16="http://schemas.microsoft.com/office/drawing/2014/main" id="{F51F1F6D-3593-4B1D-BDEB-18BA4443E4D9}"/>
               </a:ext>
             </a:extLst>
           </p:cNvPr>
@@ -6858,14 +6855,14 @@
           <p:nvPr/>
         </p:nvSpPr>
         <p:spPr>
-          <a:xfrm rot="7614092">
-            <a:off x="5738888" y="6152530"/>
-            <a:ext cx="826177" cy="3549725"/>
+          <a:xfrm rot="11893563">
+            <a:off x="9433085" y="5495442"/>
+            <a:ext cx="945855" cy="2408400"/>
           </a:xfrm>
           <a:prstGeom prst="downArrow">
             <a:avLst>
-              <a:gd name="adj1" fmla="val 27740"/>
-              <a:gd name="adj2" fmla="val 61554"/>
+              <a:gd name="adj1" fmla="val 36182"/>
+              <a:gd name="adj2" fmla="val 50000"/>
             </a:avLst>
           </a:prstGeom>
           <a:solidFill>
@@ -6900,12 +6897,42 @@
           </a:p>
         </p:txBody>
       </p:sp>
-      <p:sp>
-        <p:nvSpPr>
-          <p:cNvPr id="58" name="Arrow: Down 57">
-            <a:extLst>
-              <a:ext uri="{FF2B5EF4-FFF2-40B4-BE49-F238E27FC236}">
-                <a16:creationId xmlns:a16="http://schemas.microsoft.com/office/drawing/2014/main" id="{57461CF9-139F-4F5C-8E5F-AE61224F6027}"/>
+    </p:spTree>
+    <p:extLst>
+      <p:ext uri="{BB962C8B-B14F-4D97-AF65-F5344CB8AC3E}">
+        <p14:creationId xmlns:p14="http://schemas.microsoft.com/office/powerpoint/2010/main" val="1655096152"/>
+      </p:ext>
+    </p:extLst>
+  </p:cSld>
+  <p:clrMapOvr>
+    <a:masterClrMapping/>
+  </p:clrMapOvr>
+</p:sld>
+</file>
+
+<file path=ppt/slides/slide4.xml><?xml version="1.0" encoding="utf-8"?>
+<p:sld xmlns:a="http://schemas.openxmlformats.org/drawingml/2006/main" xmlns:r="http://schemas.openxmlformats.org/officeDocument/2006/relationships" xmlns:p="http://schemas.openxmlformats.org/presentationml/2006/main">
+  <p:cSld>
+    <p:spTree>
+      <p:nvGrpSpPr>
+        <p:cNvPr id="1" name=""/>
+        <p:cNvGrpSpPr/>
+        <p:nvPr/>
+      </p:nvGrpSpPr>
+      <p:grpSpPr>
+        <a:xfrm>
+          <a:off x="0" y="0"/>
+          <a:ext cx="0" cy="0"/>
+          <a:chOff x="0" y="0"/>
+          <a:chExt cx="0" cy="0"/>
+        </a:xfrm>
+      </p:grpSpPr>
+      <p:sp>
+        <p:nvSpPr>
+          <p:cNvPr id="8" name="Rectangle 7">
+            <a:extLst>
+              <a:ext uri="{FF2B5EF4-FFF2-40B4-BE49-F238E27FC236}">
+                <a16:creationId xmlns:a16="http://schemas.microsoft.com/office/drawing/2014/main" id="{603D3ADD-BA91-4193-AC4F-93640130FB16}"/>
               </a:ext>
             </a:extLst>
           </p:cNvPr>
@@ -6913,21 +6940,20 @@
           <p:nvPr/>
         </p:nvSpPr>
         <p:spPr>
-          <a:xfrm rot="8979305">
-            <a:off x="8907875" y="6679451"/>
-            <a:ext cx="322103" cy="978447"/>
-          </a:xfrm>
-          <a:prstGeom prst="downArrow">
-            <a:avLst>
-              <a:gd name="adj1" fmla="val 27740"/>
-              <a:gd name="adj2" fmla="val 61554"/>
-            </a:avLst>
+          <a:xfrm>
+            <a:off x="-4010544" y="-3015169"/>
+            <a:ext cx="20780894" cy="13054113"/>
+          </a:xfrm>
+          <a:prstGeom prst="rect">
+            <a:avLst/>
           </a:prstGeom>
           <a:solidFill>
-            <a:schemeClr val="bg1"/>
+            <a:srgbClr val="200785"/>
           </a:solidFill>
           <a:ln>
-            <a:noFill/>
+            <a:solidFill>
+              <a:schemeClr val="bg1"/>
+            </a:solidFill>
           </a:ln>
         </p:spPr>
         <p:style>
@@ -6955,12 +6981,94 @@
           </a:p>
         </p:txBody>
       </p:sp>
-      <p:sp>
-        <p:nvSpPr>
-          <p:cNvPr id="59" name="TextBox 58">
-            <a:extLst>
-              <a:ext uri="{FF2B5EF4-FFF2-40B4-BE49-F238E27FC236}">
-                <a16:creationId xmlns:a16="http://schemas.microsoft.com/office/drawing/2014/main" id="{6DB6909F-14EC-4858-AC45-046C6D3707DE}"/>
+      <p:pic>
+        <p:nvPicPr>
+          <p:cNvPr id="3" name="Picture 2">
+            <a:extLst>
+              <a:ext uri="{FF2B5EF4-FFF2-40B4-BE49-F238E27FC236}">
+                <a16:creationId xmlns:a16="http://schemas.microsoft.com/office/drawing/2014/main" id="{F709A3C8-6E0B-4872-B2EF-B861317358BB}"/>
+              </a:ext>
+            </a:extLst>
+          </p:cNvPr>
+          <p:cNvPicPr>
+            <a:picLocks noChangeAspect="1"/>
+          </p:cNvPicPr>
+          <p:nvPr/>
+        </p:nvPicPr>
+        <p:blipFill>
+          <a:blip r:embed="rId2"/>
+          <a:stretch>
+            <a:fillRect/>
+          </a:stretch>
+        </p:blipFill>
+        <p:spPr>
+          <a:xfrm>
+            <a:off x="0" y="0"/>
+            <a:ext cx="12192000" cy="6857999"/>
+          </a:xfrm>
+          <a:prstGeom prst="rect">
+            <a:avLst/>
+          </a:prstGeom>
+        </p:spPr>
+      </p:pic>
+      <p:sp>
+        <p:nvSpPr>
+          <p:cNvPr id="6" name="Oval 5">
+            <a:extLst>
+              <a:ext uri="{FF2B5EF4-FFF2-40B4-BE49-F238E27FC236}">
+                <a16:creationId xmlns:a16="http://schemas.microsoft.com/office/drawing/2014/main" id="{5787AB74-B9A4-4620-9DCC-1EFD1E7391B4}"/>
+              </a:ext>
+            </a:extLst>
+          </p:cNvPr>
+          <p:cNvSpPr/>
+          <p:nvPr/>
+        </p:nvSpPr>
+        <p:spPr>
+          <a:xfrm>
+            <a:off x="1704518" y="3943142"/>
+            <a:ext cx="10665988" cy="1830403"/>
+          </a:xfrm>
+          <a:prstGeom prst="ellipse">
+            <a:avLst/>
+          </a:prstGeom>
+          <a:noFill/>
+          <a:ln w="152400">
+            <a:solidFill>
+              <a:schemeClr val="bg1"/>
+            </a:solidFill>
+          </a:ln>
+        </p:spPr>
+        <p:style>
+          <a:lnRef idx="2">
+            <a:schemeClr val="accent1">
+              <a:shade val="50000"/>
+            </a:schemeClr>
+          </a:lnRef>
+          <a:fillRef idx="1">
+            <a:schemeClr val="accent1"/>
+          </a:fillRef>
+          <a:effectRef idx="0">
+            <a:schemeClr val="accent1"/>
+          </a:effectRef>
+          <a:fontRef idx="minor">
+            <a:schemeClr val="lt1"/>
+          </a:fontRef>
+        </p:style>
+        <p:txBody>
+          <a:bodyPr rtlCol="0" anchor="ctr"/>
+          <a:lstStyle/>
+          <a:p>
+            <a:pPr algn="ctr"/>
+            <a:endParaRPr lang="en-US" dirty="0"/>
+          </a:p>
+        </p:txBody>
+      </p:sp>
+      <p:sp>
+        <p:nvSpPr>
+          <p:cNvPr id="7" name="TextBox 6">
+            <a:extLst>
+              <a:ext uri="{FF2B5EF4-FFF2-40B4-BE49-F238E27FC236}">
+                <a16:creationId xmlns:a16="http://schemas.microsoft.com/office/drawing/2014/main" id="{FFE04406-2815-44E6-B6C9-3A9FFB583EBB}"/>
               </a:ext>
             </a:extLst>
           </p:cNvPr>
@@ -6969,8 +7077,344 @@
         </p:nvSpPr>
         <p:spPr>
           <a:xfrm>
-            <a:off x="9268923" y="7542466"/>
-            <a:ext cx="8405147" cy="707886"/>
+            <a:off x="-785210" y="-1620052"/>
+            <a:ext cx="7822722" cy="1015663"/>
+          </a:xfrm>
+          <a:prstGeom prst="rect">
+            <a:avLst/>
+          </a:prstGeom>
+          <a:noFill/>
+        </p:spPr>
+        <p:txBody>
+          <a:bodyPr wrap="square" rtlCol="0">
+            <a:spAutoFit/>
+          </a:bodyPr>
+          <a:lstStyle/>
+          <a:p>
+            <a:pPr algn="ctr"/>
+            <a:r>
+              <a:rPr lang="en-US" sz="6000" dirty="0">
+                <a:solidFill>
+                  <a:schemeClr val="bg1"/>
+                </a:solidFill>
+                <a:latin typeface="Arial" panose="020B0604020202020204" pitchFamily="34" charset="0"/>
+                <a:cs typeface="Arial" panose="020B0604020202020204" pitchFamily="34" charset="0"/>
+              </a:rPr>
+              <a:t>Pick</a:t>
+            </a:r>
+            <a:r>
+              <a:rPr lang="en-US" sz="6000" b="1" dirty="0">
+                <a:solidFill>
+                  <a:schemeClr val="bg1"/>
+                </a:solidFill>
+                <a:latin typeface="Arial" panose="020B0604020202020204" pitchFamily="34" charset="0"/>
+                <a:cs typeface="Arial" panose="020B0604020202020204" pitchFamily="34" charset="0"/>
+              </a:rPr>
+              <a:t> any level </a:t>
+            </a:r>
+            <a:r>
+              <a:rPr lang="en-US" sz="6000" dirty="0">
+                <a:solidFill>
+                  <a:schemeClr val="bg1"/>
+                </a:solidFill>
+                <a:latin typeface="Arial" panose="020B0604020202020204" pitchFamily="34" charset="0"/>
+                <a:cs typeface="Arial" panose="020B0604020202020204" pitchFamily="34" charset="0"/>
+              </a:rPr>
+              <a:t>freely</a:t>
+            </a:r>
+            <a:endParaRPr lang="en-US" sz="4000" dirty="0">
+              <a:solidFill>
+                <a:schemeClr val="bg1"/>
+              </a:solidFill>
+              <a:latin typeface="Arial" panose="020B0604020202020204" pitchFamily="34" charset="0"/>
+              <a:cs typeface="Arial" panose="020B0604020202020204" pitchFamily="34" charset="0"/>
+            </a:endParaRPr>
+          </a:p>
+        </p:txBody>
+      </p:sp>
+      <p:sp>
+        <p:nvSpPr>
+          <p:cNvPr id="10" name="Arrow: Down 9">
+            <a:extLst>
+              <a:ext uri="{FF2B5EF4-FFF2-40B4-BE49-F238E27FC236}">
+                <a16:creationId xmlns:a16="http://schemas.microsoft.com/office/drawing/2014/main" id="{C02D3F46-44F4-4DE9-924D-1933A8738E90}"/>
+              </a:ext>
+            </a:extLst>
+          </p:cNvPr>
+          <p:cNvSpPr/>
+          <p:nvPr/>
+        </p:nvSpPr>
+        <p:spPr>
+          <a:xfrm>
+            <a:off x="2641503" y="-352557"/>
+            <a:ext cx="1403337" cy="4052733"/>
+          </a:xfrm>
+          <a:prstGeom prst="downArrow">
+            <a:avLst/>
+          </a:prstGeom>
+          <a:solidFill>
+            <a:schemeClr val="bg1"/>
+          </a:solidFill>
+          <a:ln>
+            <a:noFill/>
+          </a:ln>
+        </p:spPr>
+        <p:style>
+          <a:lnRef idx="2">
+            <a:schemeClr val="accent1">
+              <a:shade val="50000"/>
+            </a:schemeClr>
+          </a:lnRef>
+          <a:fillRef idx="1">
+            <a:schemeClr val="accent1"/>
+          </a:fillRef>
+          <a:effectRef idx="0">
+            <a:schemeClr val="accent1"/>
+          </a:effectRef>
+          <a:fontRef idx="minor">
+            <a:schemeClr val="lt1"/>
+          </a:fontRef>
+        </p:style>
+        <p:txBody>
+          <a:bodyPr rtlCol="0" anchor="ctr"/>
+          <a:lstStyle/>
+          <a:p>
+            <a:pPr algn="ctr"/>
+            <a:endParaRPr lang="en-US"/>
+          </a:p>
+        </p:txBody>
+      </p:sp>
+      <p:sp>
+        <p:nvSpPr>
+          <p:cNvPr id="26" name="TextBox 25">
+            <a:extLst>
+              <a:ext uri="{FF2B5EF4-FFF2-40B4-BE49-F238E27FC236}">
+                <a16:creationId xmlns:a16="http://schemas.microsoft.com/office/drawing/2014/main" id="{90A76582-AE1C-4166-AE83-1C531248CC55}"/>
+              </a:ext>
+            </a:extLst>
+          </p:cNvPr>
+          <p:cNvSpPr txBox="1"/>
+          <p:nvPr/>
+        </p:nvSpPr>
+        <p:spPr>
+          <a:xfrm>
+            <a:off x="12719614" y="-144074"/>
+            <a:ext cx="3251321" cy="1200329"/>
+          </a:xfrm>
+          <a:prstGeom prst="rect">
+            <a:avLst/>
+          </a:prstGeom>
+          <a:noFill/>
+        </p:spPr>
+        <p:txBody>
+          <a:bodyPr wrap="square" rtlCol="0">
+            <a:spAutoFit/>
+          </a:bodyPr>
+          <a:lstStyle/>
+          <a:p>
+            <a:r>
+              <a:rPr lang="en-US" sz="3200" b="1" i="1" dirty="0">
+                <a:solidFill>
+                  <a:schemeClr val="bg1"/>
+                </a:solidFill>
+                <a:latin typeface="Arial" panose="020B0604020202020204" pitchFamily="34" charset="0"/>
+                <a:cs typeface="Arial" panose="020B0604020202020204" pitchFamily="34" charset="0"/>
+              </a:rPr>
+              <a:t>Pictograms</a:t>
+            </a:r>
+            <a:endParaRPr lang="en-US" b="1" i="1" dirty="0">
+              <a:solidFill>
+                <a:schemeClr val="bg1"/>
+              </a:solidFill>
+              <a:latin typeface="Arial" panose="020B0604020202020204" pitchFamily="34" charset="0"/>
+              <a:cs typeface="Arial" panose="020B0604020202020204" pitchFamily="34" charset="0"/>
+            </a:endParaRPr>
+          </a:p>
+          <a:p>
+            <a:r>
+              <a:rPr lang="en-US" sz="2000" i="1" dirty="0">
+                <a:solidFill>
+                  <a:schemeClr val="bg1"/>
+                </a:solidFill>
+                <a:latin typeface="Arial" panose="020B0604020202020204" pitchFamily="34" charset="0"/>
+                <a:cs typeface="Arial" panose="020B0604020202020204" pitchFamily="34" charset="0"/>
+              </a:rPr>
+              <a:t>A these mean “numbers” and “building blocks” </a:t>
+            </a:r>
+          </a:p>
+        </p:txBody>
+      </p:sp>
+      <p:sp>
+        <p:nvSpPr>
+          <p:cNvPr id="28" name="Arrow: Down 27">
+            <a:extLst>
+              <a:ext uri="{FF2B5EF4-FFF2-40B4-BE49-F238E27FC236}">
+                <a16:creationId xmlns:a16="http://schemas.microsoft.com/office/drawing/2014/main" id="{9D4212BF-96A5-4B59-A5D0-715C941E52A2}"/>
+              </a:ext>
+            </a:extLst>
+          </p:cNvPr>
+          <p:cNvSpPr/>
+          <p:nvPr/>
+        </p:nvSpPr>
+        <p:spPr>
+          <a:xfrm rot="5400000">
+            <a:off x="12272315" y="1926"/>
+            <a:ext cx="281050" cy="506950"/>
+          </a:xfrm>
+          <a:prstGeom prst="downArrow">
+            <a:avLst/>
+          </a:prstGeom>
+          <a:solidFill>
+            <a:schemeClr val="bg1"/>
+          </a:solidFill>
+          <a:ln>
+            <a:noFill/>
+          </a:ln>
+        </p:spPr>
+        <p:style>
+          <a:lnRef idx="2">
+            <a:schemeClr val="accent1">
+              <a:shade val="50000"/>
+            </a:schemeClr>
+          </a:lnRef>
+          <a:fillRef idx="1">
+            <a:schemeClr val="accent1"/>
+          </a:fillRef>
+          <a:effectRef idx="0">
+            <a:schemeClr val="accent1"/>
+          </a:effectRef>
+          <a:fontRef idx="minor">
+            <a:schemeClr val="lt1"/>
+          </a:fontRef>
+        </p:style>
+        <p:txBody>
+          <a:bodyPr rtlCol="0" anchor="ctr"/>
+          <a:lstStyle/>
+          <a:p>
+            <a:pPr algn="ctr"/>
+            <a:endParaRPr lang="en-US"/>
+          </a:p>
+        </p:txBody>
+      </p:sp>
+      <p:sp>
+        <p:nvSpPr>
+          <p:cNvPr id="45" name="TextBox 44">
+            <a:extLst>
+              <a:ext uri="{FF2B5EF4-FFF2-40B4-BE49-F238E27FC236}">
+                <a16:creationId xmlns:a16="http://schemas.microsoft.com/office/drawing/2014/main" id="{4B9054AB-6B76-4B50-84FD-86F227276697}"/>
+              </a:ext>
+            </a:extLst>
+          </p:cNvPr>
+          <p:cNvSpPr txBox="1"/>
+          <p:nvPr/>
+        </p:nvSpPr>
+        <p:spPr>
+          <a:xfrm>
+            <a:off x="11543916" y="-656062"/>
+            <a:ext cx="3831848" cy="369332"/>
+          </a:xfrm>
+          <a:prstGeom prst="rect">
+            <a:avLst/>
+          </a:prstGeom>
+          <a:noFill/>
+        </p:spPr>
+        <p:txBody>
+          <a:bodyPr wrap="square" rtlCol="0">
+            <a:spAutoFit/>
+          </a:bodyPr>
+          <a:lstStyle/>
+          <a:p>
+            <a:r>
+              <a:rPr lang="en-US" b="1" i="1" dirty="0">
+                <a:solidFill>
+                  <a:schemeClr val="bg1"/>
+                </a:solidFill>
+                <a:latin typeface="Arial" panose="020B0604020202020204" pitchFamily="34" charset="0"/>
+                <a:cs typeface="Arial" panose="020B0604020202020204" pitchFamily="34" charset="0"/>
+              </a:rPr>
+              <a:t>4 stars is hard, </a:t>
+            </a:r>
+            <a:r>
+              <a:rPr lang="en-US" i="1" dirty="0">
+                <a:solidFill>
+                  <a:schemeClr val="bg1"/>
+                </a:solidFill>
+                <a:latin typeface="Arial" panose="020B0604020202020204" pitchFamily="34" charset="0"/>
+                <a:cs typeface="Arial" panose="020B0604020202020204" pitchFamily="34" charset="0"/>
+              </a:rPr>
+              <a:t>5 is hardest</a:t>
+            </a:r>
+          </a:p>
+        </p:txBody>
+      </p:sp>
+      <p:sp>
+        <p:nvSpPr>
+          <p:cNvPr id="46" name="Arrow: Down 45">
+            <a:extLst>
+              <a:ext uri="{FF2B5EF4-FFF2-40B4-BE49-F238E27FC236}">
+                <a16:creationId xmlns:a16="http://schemas.microsoft.com/office/drawing/2014/main" id="{761B991B-0406-4914-A43C-699F1414F031}"/>
+              </a:ext>
+            </a:extLst>
+          </p:cNvPr>
+          <p:cNvSpPr/>
+          <p:nvPr/>
+        </p:nvSpPr>
+        <p:spPr>
+          <a:xfrm rot="2717767">
+            <a:off x="11272838" y="-406907"/>
+            <a:ext cx="311256" cy="391124"/>
+          </a:xfrm>
+          <a:prstGeom prst="downArrow">
+            <a:avLst/>
+          </a:prstGeom>
+          <a:solidFill>
+            <a:schemeClr val="bg1"/>
+          </a:solidFill>
+          <a:ln>
+            <a:noFill/>
+          </a:ln>
+        </p:spPr>
+        <p:style>
+          <a:lnRef idx="2">
+            <a:schemeClr val="accent1">
+              <a:shade val="50000"/>
+            </a:schemeClr>
+          </a:lnRef>
+          <a:fillRef idx="1">
+            <a:schemeClr val="accent1"/>
+          </a:fillRef>
+          <a:effectRef idx="0">
+            <a:schemeClr val="accent1"/>
+          </a:effectRef>
+          <a:fontRef idx="minor">
+            <a:schemeClr val="lt1"/>
+          </a:fontRef>
+        </p:style>
+        <p:txBody>
+          <a:bodyPr rtlCol="0" anchor="ctr"/>
+          <a:lstStyle/>
+          <a:p>
+            <a:pPr algn="ctr"/>
+            <a:endParaRPr lang="en-US"/>
+          </a:p>
+        </p:txBody>
+      </p:sp>
+      <p:sp>
+        <p:nvSpPr>
+          <p:cNvPr id="52" name="TextBox 51">
+            <a:extLst>
+              <a:ext uri="{FF2B5EF4-FFF2-40B4-BE49-F238E27FC236}">
+                <a16:creationId xmlns:a16="http://schemas.microsoft.com/office/drawing/2014/main" id="{B8EE408C-0E4C-4273-BA6E-B5CE36BD7831}"/>
+              </a:ext>
+            </a:extLst>
+          </p:cNvPr>
+          <p:cNvSpPr txBox="1"/>
+          <p:nvPr/>
+        </p:nvSpPr>
+        <p:spPr>
+          <a:xfrm>
+            <a:off x="2681856" y="7095453"/>
+            <a:ext cx="6901314" cy="1323439"/>
           </a:xfrm>
           <a:prstGeom prst="rect">
             <a:avLst/>
@@ -6991,7 +7435,19 @@
                 <a:latin typeface="Arial" panose="020B0604020202020204" pitchFamily="34" charset="0"/>
                 <a:cs typeface="Arial" panose="020B0604020202020204" pitchFamily="34" charset="0"/>
               </a:rPr>
-              <a:t>Send </a:t>
+              <a:t> </a:t>
+            </a:r>
+          </a:p>
+          <a:p>
+            <a:r>
+              <a:rPr lang="en-US" sz="4000" dirty="0">
+                <a:solidFill>
+                  <a:schemeClr val="bg1"/>
+                </a:solidFill>
+                <a:latin typeface="Arial" panose="020B0604020202020204" pitchFamily="34" charset="0"/>
+                <a:cs typeface="Arial" panose="020B0604020202020204" pitchFamily="34" charset="0"/>
+              </a:rPr>
+              <a:t>Show/hide the </a:t>
             </a:r>
             <a:r>
               <a:rPr lang="en-US" sz="4000" b="1" dirty="0">
@@ -7001,18 +7457,63 @@
                 <a:latin typeface="Arial" panose="020B0604020202020204" pitchFamily="34" charset="0"/>
                 <a:cs typeface="Arial" panose="020B0604020202020204" pitchFamily="34" charset="0"/>
               </a:rPr>
-              <a:t>feedback</a:t>
-            </a:r>
-            <a:r>
-              <a:rPr lang="en-US" sz="4000" dirty="0">
-                <a:solidFill>
-                  <a:schemeClr val="bg1"/>
-                </a:solidFill>
-                <a:latin typeface="Arial" panose="020B0604020202020204" pitchFamily="34" charset="0"/>
-                <a:cs typeface="Arial" panose="020B0604020202020204" pitchFamily="34" charset="0"/>
-              </a:rPr>
-              <a:t> any time!</a:t>
-            </a:r>
+              <a:t>level selector</a:t>
+            </a:r>
+          </a:p>
+        </p:txBody>
+      </p:sp>
+      <p:sp>
+        <p:nvSpPr>
+          <p:cNvPr id="27" name="Arrow: Down 26">
+            <a:extLst>
+              <a:ext uri="{FF2B5EF4-FFF2-40B4-BE49-F238E27FC236}">
+                <a16:creationId xmlns:a16="http://schemas.microsoft.com/office/drawing/2014/main" id="{F25D5911-E59E-401D-89CD-79AD7F4C69E4}"/>
+              </a:ext>
+            </a:extLst>
+          </p:cNvPr>
+          <p:cNvSpPr/>
+          <p:nvPr/>
+        </p:nvSpPr>
+        <p:spPr>
+          <a:xfrm rot="10800000">
+            <a:off x="7373976" y="6927366"/>
+            <a:ext cx="602672" cy="768392"/>
+          </a:xfrm>
+          <a:prstGeom prst="downArrow">
+            <a:avLst>
+              <a:gd name="adj1" fmla="val 45638"/>
+              <a:gd name="adj2" fmla="val 50000"/>
+            </a:avLst>
+          </a:prstGeom>
+          <a:solidFill>
+            <a:schemeClr val="bg1"/>
+          </a:solidFill>
+          <a:ln>
+            <a:noFill/>
+          </a:ln>
+        </p:spPr>
+        <p:style>
+          <a:lnRef idx="2">
+            <a:schemeClr val="accent1">
+              <a:shade val="50000"/>
+            </a:schemeClr>
+          </a:lnRef>
+          <a:fillRef idx="1">
+            <a:schemeClr val="accent1"/>
+          </a:fillRef>
+          <a:effectRef idx="0">
+            <a:schemeClr val="accent1"/>
+          </a:effectRef>
+          <a:fontRef idx="minor">
+            <a:schemeClr val="lt1"/>
+          </a:fontRef>
+        </p:style>
+        <p:txBody>
+          <a:bodyPr rtlCol="0" anchor="ctr"/>
+          <a:lstStyle/>
+          <a:p>
+            <a:pPr algn="ctr"/>
+            <a:endParaRPr lang="en-US" dirty="0"/>
           </a:p>
         </p:txBody>
       </p:sp>
